--- a/assets/pptx/catalog-126.pptx
+++ b/assets/pptx/catalog-126.pptx
@@ -3301,7 +3301,7 @@
                 <a:ea typeface="Ebrima"/>
                 <a:cs typeface="Ebrima"/>
               </a:rPr>
-              <a:t>እቀኝልሃለው የሂወቴ ጌታ (2)</a:t>
+              <a:t>እቀኝልሃለው የሂወቴ ጌታ 2</a:t>
             </a:r>
           </a:p>
         </p:txBody>
@@ -3404,7 +3404,7 @@
                 <a:ea typeface="Ebrima"/>
                 <a:cs typeface="Ebrima"/>
               </a:rPr>
-              <a:t>አረ እኔ ኣላቆምም ምስጋና (2)</a:t>
+              <a:t>አረ እኔ ኣላቆምም ምስጋና 2</a:t>
             </a:r>
           </a:p>
           <a:p>
@@ -3458,7 +3458,7 @@
                 <a:ea typeface="Ebrima"/>
                 <a:cs typeface="Ebrima"/>
               </a:rPr>
-              <a:t>አረ እኔ ኣላቆምም እልልታ(2)</a:t>
+              <a:t>አረ እኔ ኣላቆምም እልልታ2</a:t>
             </a:r>
           </a:p>
         </p:txBody>
@@ -3682,7 +3682,7 @@
                 <a:ea typeface="Ebrima"/>
                 <a:cs typeface="Ebrima"/>
               </a:rPr>
-              <a:t>አረ እኔ ኣላቆምም ምስጋና (2)</a:t>
+              <a:t>አረ እኔ ኣላቆምም ምስጋና 2</a:t>
             </a:r>
           </a:p>
           <a:p>
@@ -3736,7 +3736,7 @@
                 <a:ea typeface="Ebrima"/>
                 <a:cs typeface="Ebrima"/>
               </a:rPr>
-              <a:t>አረ እኔ ኣላቆምም እልልታ(2)</a:t>
+              <a:t>አረ እኔ ኣላቆምም እልልታ2</a:t>
             </a:r>
           </a:p>
         </p:txBody>
@@ -3960,7 +3960,7 @@
                 <a:ea typeface="Ebrima"/>
                 <a:cs typeface="Ebrima"/>
               </a:rPr>
-              <a:t>አረ እኔ ኣላቆምም ምስጋና (2)</a:t>
+              <a:t>አረ እኔ ኣላቆምም ምስጋና 2</a:t>
             </a:r>
           </a:p>
           <a:p>
@@ -4014,7 +4014,7 @@
                 <a:ea typeface="Ebrima"/>
                 <a:cs typeface="Ebrima"/>
               </a:rPr>
-              <a:t>አረ እኔ ኣላቆምም እልልታ(2)</a:t>
+              <a:t>አረ እኔ ኣላቆምም እልልታ2</a:t>
             </a:r>
           </a:p>
         </p:txBody>
@@ -4081,7 +4081,7 @@
                 <a:ea typeface="Ebrima"/>
                 <a:cs typeface="Ebrima"/>
               </a:rPr>
-              <a:t>ምስጋናን ዝማሬን ኣላቆምም እልልታ (8)</a:t>
+              <a:t>ምስጋናን ዝማሬን ኣላቆምም እልልታ 8</a:t>
             </a:r>
           </a:p>
         </p:txBody>
